--- a/Т_И_С/ПМ1_ТИС_Установка и сопровождение программного и аппаратного обеспечения/РО1-5-Администрировать Windows и Windows Server на базовом уровне/08-Файловый сервер и FSRM.pptx
+++ b/Т_И_С/ПМ1_ТИС_Установка и сопровождение программного и аппаратного обеспечения/РО1-5-Администрировать Windows и Windows Server на базовом уровне/08-Файловый сервер и FSRM.pptx
@@ -333,7 +333,7 @@
           <a:p>
             <a:fld id="{5BCAD085-E8A6-8845-BD4E-CB4CCA059FC4}" type="datetimeFigureOut">
               <a:rPr lang="en-US" smtClean="0"/>
-              <a:t>7/18/2026</a:t>
+              <a:t>8/5/2026</a:t>
             </a:fld>
             <a:endParaRPr lang="en-US"/>
           </a:p>
@@ -501,7 +501,7 @@
           <a:p>
             <a:fld id="{5BCAD085-E8A6-8845-BD4E-CB4CCA059FC4}" type="datetimeFigureOut">
               <a:rPr lang="en-US" smtClean="0"/>
-              <a:t>7/18/2026</a:t>
+              <a:t>8/5/2026</a:t>
             </a:fld>
             <a:endParaRPr lang="en-US"/>
           </a:p>
@@ -679,7 +679,7 @@
           <a:p>
             <a:fld id="{5BCAD085-E8A6-8845-BD4E-CB4CCA059FC4}" type="datetimeFigureOut">
               <a:rPr lang="en-US" smtClean="0"/>
-              <a:t>7/18/2026</a:t>
+              <a:t>8/5/2026</a:t>
             </a:fld>
             <a:endParaRPr lang="en-US"/>
           </a:p>
@@ -847,7 +847,7 @@
           <a:p>
             <a:fld id="{5BCAD085-E8A6-8845-BD4E-CB4CCA059FC4}" type="datetimeFigureOut">
               <a:rPr lang="en-US" smtClean="0"/>
-              <a:t>7/18/2026</a:t>
+              <a:t>8/5/2026</a:t>
             </a:fld>
             <a:endParaRPr lang="en-US"/>
           </a:p>
@@ -1092,7 +1092,7 @@
           <a:p>
             <a:fld id="{5BCAD085-E8A6-8845-BD4E-CB4CCA059FC4}" type="datetimeFigureOut">
               <a:rPr lang="en-US" smtClean="0"/>
-              <a:t>7/18/2026</a:t>
+              <a:t>8/5/2026</a:t>
             </a:fld>
             <a:endParaRPr lang="en-US"/>
           </a:p>
@@ -1377,7 +1377,7 @@
           <a:p>
             <a:fld id="{5BCAD085-E8A6-8845-BD4E-CB4CCA059FC4}" type="datetimeFigureOut">
               <a:rPr lang="en-US" smtClean="0"/>
-              <a:t>7/18/2026</a:t>
+              <a:t>8/5/2026</a:t>
             </a:fld>
             <a:endParaRPr lang="en-US"/>
           </a:p>
@@ -1796,7 +1796,7 @@
           <a:p>
             <a:fld id="{5BCAD085-E8A6-8845-BD4E-CB4CCA059FC4}" type="datetimeFigureOut">
               <a:rPr lang="en-US" smtClean="0"/>
-              <a:t>7/18/2026</a:t>
+              <a:t>8/5/2026</a:t>
             </a:fld>
             <a:endParaRPr lang="en-US"/>
           </a:p>
@@ -1913,7 +1913,7 @@
           <a:p>
             <a:fld id="{5BCAD085-E8A6-8845-BD4E-CB4CCA059FC4}" type="datetimeFigureOut">
               <a:rPr lang="en-US" smtClean="0"/>
-              <a:t>7/18/2026</a:t>
+              <a:t>8/5/2026</a:t>
             </a:fld>
             <a:endParaRPr lang="en-US"/>
           </a:p>
@@ -2008,7 +2008,7 @@
           <a:p>
             <a:fld id="{5BCAD085-E8A6-8845-BD4E-CB4CCA059FC4}" type="datetimeFigureOut">
               <a:rPr lang="en-US" smtClean="0"/>
-              <a:t>7/18/2026</a:t>
+              <a:t>8/5/2026</a:t>
             </a:fld>
             <a:endParaRPr lang="en-US"/>
           </a:p>
@@ -2283,7 +2283,7 @@
           <a:p>
             <a:fld id="{5BCAD085-E8A6-8845-BD4E-CB4CCA059FC4}" type="datetimeFigureOut">
               <a:rPr lang="en-US" smtClean="0"/>
-              <a:t>7/18/2026</a:t>
+              <a:t>8/5/2026</a:t>
             </a:fld>
             <a:endParaRPr lang="en-US"/>
           </a:p>
@@ -2535,7 +2535,7 @@
           <a:p>
             <a:fld id="{5BCAD085-E8A6-8845-BD4E-CB4CCA059FC4}" type="datetimeFigureOut">
               <a:rPr lang="en-US" smtClean="0"/>
-              <a:t>7/18/2026</a:t>
+              <a:t>8/5/2026</a:t>
             </a:fld>
             <a:endParaRPr lang="en-US"/>
           </a:p>
@@ -2746,7 +2746,7 @@
           <a:p>
             <a:fld id="{5BCAD085-E8A6-8845-BD4E-CB4CCA059FC4}" type="datetimeFigureOut">
               <a:rPr lang="en-US" smtClean="0"/>
-              <a:t>7/18/2026</a:t>
+              <a:t>8/5/2026</a:t>
             </a:fld>
             <a:endParaRPr lang="en-US"/>
           </a:p>
@@ -3129,8 +3129,8 @@
         </p:nvSpPr>
         <p:spPr>
           <a:xfrm>
-            <a:off x="274320" y="182880"/>
-            <a:ext cx="11612880" cy="640080"/>
+            <a:off x="2773091" y="594360"/>
+            <a:ext cx="6615337" cy="584775"/>
           </a:xfrm>
           <a:prstGeom prst="rect">
             <a:avLst/>
@@ -3151,7 +3151,35 @@
               </a:defRPr>
             </a:pPr>
             <a:r>
-              <a:t>Лекция 6. Файловый сервер и FSRM</a:t>
+              <a:rPr dirty="0" err="1"/>
+              <a:t>Лекция</a:t>
+            </a:r>
+            <a:r>
+              <a:rPr dirty="0"/>
+              <a:t> </a:t>
+            </a:r>
+            <a:r>
+              <a:rPr lang="ru-RU"/>
+              <a:t>8</a:t>
+            </a:r>
+            <a:r>
+              <a:t>. </a:t>
+            </a:r>
+            <a:r>
+              <a:rPr dirty="0" err="1"/>
+              <a:t>Файловый</a:t>
+            </a:r>
+            <a:r>
+              <a:rPr dirty="0"/>
+              <a:t> </a:t>
+            </a:r>
+            <a:r>
+              <a:rPr dirty="0" err="1"/>
+              <a:t>сервер</a:t>
+            </a:r>
+            <a:r>
+              <a:rPr dirty="0"/>
+              <a:t> и FSRM</a:t>
             </a:r>
           </a:p>
         </p:txBody>
